--- a/CB.SC.U4CSE23134_Review2_Rubric.pptx
+++ b/CB.SC.U4CSE23134_Review2_Rubric.pptx
@@ -2007,7 +2007,7 @@
                 </a:solidFill>
                 <a:latin typeface="Cambria"/>
               </a:rPr>
-              <a:t>27</a:t>
+              <a:t>37</a:t>
             </a:r>
           </a:p>
         </p:txBody>
@@ -2162,7 +2162,7 @@
                 </a:solidFill>
                 <a:latin typeface="Cambria"/>
               </a:rPr>
-              <a:t>23</a:t>
+              <a:t>13</a:t>
             </a:r>
           </a:p>
         </p:txBody>
@@ -2733,7 +2733,7 @@
                 </a:solidFill>
                 <a:latin typeface="Cambria"/>
               </a:rPr>
-              <a:t>27</a:t>
+              <a:t>37</a:t>
             </a:r>
           </a:p>
         </p:txBody>
@@ -2888,7 +2888,7 @@
                 </a:solidFill>
                 <a:latin typeface="Cambria"/>
               </a:rPr>
-              <a:t>11</a:t>
+              <a:t>6</a:t>
             </a:r>
           </a:p>
         </p:txBody>
@@ -3043,7 +3043,7 @@
                 </a:solidFill>
                 <a:latin typeface="Cambria"/>
               </a:rPr>
-              <a:t>12</a:t>
+              <a:t>7</a:t>
             </a:r>
           </a:p>
         </p:txBody>
@@ -3198,7 +3198,7 @@
                 </a:solidFill>
                 <a:latin typeface="Cambria"/>
               </a:rPr>
-              <a:t>27/50</a:t>
+              <a:t>37/50</a:t>
             </a:r>
           </a:p>
         </p:txBody>
@@ -3306,7 +3306,7 @@
                 </a:solidFill>
                 <a:latin typeface="Calibri"/>
               </a:rPr>
-              <a:t>WHAT UNLOCKS THE MOST MARKS</a:t>
+              <a:t>WHAT IS LEFT</a:t>
             </a:r>
           </a:p>
         </p:txBody>
@@ -3430,7 +3430,7 @@
                 </a:solidFill>
                 <a:latin typeface="Calibri"/>
               </a:rPr>
-              <a:t>Literature survey</a:t>
+              <a:t>Literature survey (5)</a:t>
             </a:r>
           </a:p>
         </p:txBody>
@@ -3469,7 +3469,7 @@
                 </a:solidFill>
                 <a:latin typeface="Calibri"/>
               </a:rPr>
-              <a:t>5 marks itself, and unblocks rows 5 and 12 - 10 more behind it.</a:t>
+              <a:t>Five papers verified against the SCImago 2025/2026 listing.</a:t>
             </a:r>
           </a:p>
         </p:txBody>
@@ -3593,7 +3593,7 @@
                 </a:solidFill>
                 <a:latin typeface="Calibri"/>
               </a:rPr>
-              <a:t>Algorithm procedure</a:t>
+              <a:t>Metrics column (3)</a:t>
             </a:r>
           </a:p>
         </p:txBody>
@@ -3632,7 +3632,7 @@
                 </a:solidFill>
                 <a:latin typeface="Calibri"/>
               </a:rPr>
-              <a:t>5 marks of transcription: every equation is already coded.</a:t>
+              <a:t>'Best value in the papers' - blocked on the survey.</a:t>
             </a:r>
           </a:p>
         </p:txBody>
@@ -3756,7 +3756,7 @@
                 </a:solidFill>
                 <a:latin typeface="Calibri"/>
               </a:rPr>
-              <a:t>Novelty + complexity</a:t>
+              <a:t>Standard paper (2)</a:t>
             </a:r>
           </a:p>
         </p:txBody>
@@ -3795,7 +3795,7 @@
                 </a:solidFill>
                 <a:latin typeface="Calibri"/>
               </a:rPr>
-              <a:t>Completes row 6. State the novelty as the controlled comparison.</a:t>
+              <a:t>Nominate one of the five, with a justification.</a:t>
             </a:r>
           </a:p>
         </p:txBody>
@@ -3834,7 +3834,7 @@
                 </a:solidFill>
                 <a:latin typeface="Calibri"/>
               </a:rPr>
-              <a:t>Mirrors frontend/src/lib/rubric.js, which drives the /rubric page in the running app - the deck and the product cannot disagree about what is done.</a:t>
+              <a:t>Generated from frontend/src/lib/rubric.json - the same file that drives the /rubric page in the running app, so this deck and the product cannot disagree.</a:t>
             </a:r>
           </a:p>
         </p:txBody>
@@ -4264,7 +4264,7 @@
                           </a:solidFill>
                           <a:latin typeface="Calibri"/>
                         </a:rPr>
-                        <a:t>Deck slides 3-7 (sections 01-04) and Review-template slide 2.</a:t>
+                        <a:t>Deck slides 3–7 (sections 01–04): the 63-million figure, the interpreter shortage, and the objective. Review template slide 2 carries the problem statement and objective in the faculty format.</a:t>
                       </a:r>
                     </a:p>
                   </a:txBody>
@@ -4310,7 +4310,7 @@
                           </a:solidFill>
                           <a:latin typeface="Calibri"/>
                         </a:rPr>
-                        <a:t>Literature survey - 5 papers per student, SCImago-listed, 2025/2026</a:t>
+                        <a:t>Literature survey - Five papers per student, related to your deep learning architecture, from a journal listed on scimagojr.com in 2025 or 2026.</a:t>
                       </a:r>
                     </a:p>
                   </a:txBody>
@@ -4376,7 +4376,7 @@
                           </a:solidFill>
                           <a:latin typeface="Calibri"/>
                         </a:rPr>
-                        <a:t>Five papers, each verified in the SCImago 2025/2026 listing, with architecture and reported metrics.</a:t>
+                        <a:t>Five papers, each confirmed present in the SCImago 2025/2026 listing — this confirmation has to be done by you, on scimagojr.com. For each: full citation, the architecture it uses, its reported metric values, and how it relates to the BiLSTM-vs-CNN comparison. A survey slide in the deck.</a:t>
                       </a:r>
                     </a:p>
                   </a:txBody>
@@ -4488,7 +4488,7 @@
                           </a:solidFill>
                           <a:latin typeface="Calibri"/>
                         </a:rPr>
-                        <a:t>Deck slide 16 (09 - SYSTEM ARCHITECTURE); matches the shipped code path.</a:t>
+                        <a:t>Deck slide 16 (09 — SYSTEM ARCHITECTURE). The diagram matches the shipped code path: browser capture → POST /api/frame → MediaPipe Holistic → normalise → model → gloss.</a:t>
                       </a:r>
                     </a:p>
                   </a:txBody>
@@ -4600,7 +4600,7 @@
                           </a:solidFill>
                           <a:latin typeface="Calibri"/>
                         </a:rPr>
-                        <a:t>Deck slide 17 (10 - MODULES); every module named exists as a file.</a:t>
+                        <a:t>Deck slide 17 (10 — MODULES). Every module named there exists as a file: preprocess.py, models.py, inference.py, gloss.py, practice.py.</a:t>
                       </a:r>
                     </a:p>
                   </a:txBody>
@@ -4646,7 +4646,7 @@
                           </a:solidFill>
                           <a:latin typeface="Calibri"/>
                         </a:rPr>
-                        <a:t>Formula of performance metrics</a:t>
+                        <a:t>Formula of performance metrics - A table with the metric name, its purpose, why it suits this application, and the best values discussed for that metric in the papers.</a:t>
                       </a:r>
                     </a:p>
                   </a:txBody>
@@ -4712,7 +4712,7 @@
                           </a:solidFill>
                           <a:latin typeface="Calibri"/>
                         </a:rPr>
-                        <a:t>Deck slide 26: nine metrics with formula and purpose, matching evaluate.py.   MISSING: Fourth column: best values reported in the surveyed papers (needs row 2).</a:t>
+                        <a:t>Deck slide 26 already has metric · formula · what it captures, for nine metrics. Notation is defined (N = 261 classes, n = 642 test clips). All formulas are the ones evaluate.py actually computes via sklearn.   MISSING: A fourth column: best values reported for each metric in the surveyed papers — which needs row 2 done first.</a:t>
                       </a:r>
                     </a:p>
                   </a:txBody>
@@ -4758,7 +4758,7 @@
                           </a:solidFill>
                           <a:latin typeface="Calibri"/>
                         </a:rPr>
-                        <a:t>Deep learning architecture - diagram, explanation, novelty, complexity</a:t>
+                        <a:t>Deep learning architecture - a. Diagram   b. Explanation   c. Novelty proposed   d. Time and space complexity</a:t>
                       </a:r>
                     </a:p>
                   </a:txBody>
@@ -4798,11 +4798,11 @@
                       <a:r>
                         <a:rPr sz="850" b="1" i="0">
                           <a:solidFill>
-                            <a:srgbClr val="B26A00"/>
-                          </a:solidFill>
-                          <a:latin typeface="Calibri"/>
-                        </a:rPr>
-                        <a:t>Partial</a:t>
+                            <a:srgbClr val="1B7F5E"/>
+                          </a:solidFill>
+                          <a:latin typeface="Calibri"/>
+                        </a:rPr>
+                        <a:t>Evidenced</a:t>
                       </a:r>
                     </a:p>
                   </a:txBody>
@@ -4824,7 +4824,7 @@
                           </a:solidFill>
                           <a:latin typeface="Calibri"/>
                         </a:rPr>
-                        <a:t>Deck slides 22-23: layer diagrams, design rationale, measured parameter counts.   MISSING: Explicit novelty statement (c) and big-O time/space per model (d).</a:t>
+                        <a:t>(a,b) Deck slides 22–23: layer-by-layer diagrams and design rationale for both BiLSTM and 1D CNN. (c) Deck slide 17.4 states the novelty as the controlled single-variable comparison and the shared landmark front-end — and states explicitly what is NOT claimed as novel. (d) Deck slide 17.3: big-O time, critical path, MAC counts, parameter and activation complexity for both models. The complexity is derived in scripts/analyze_complexity.py, which asserts its parameter counts against the trained checkpoints — 2,665,477 and 736,773 both match torch exactly.</a:t>
                       </a:r>
                     </a:p>
                   </a:txBody>
@@ -5238,11 +5238,11 @@
                       <a:r>
                         <a:rPr sz="850" b="1" i="0">
                           <a:solidFill>
-                            <a:srgbClr val="77777D"/>
-                          </a:solidFill>
-                          <a:latin typeface="Calibri"/>
-                        </a:rPr>
-                        <a:t>Not started</a:t>
+                            <a:srgbClr val="1B7F5E"/>
+                          </a:solidFill>
+                          <a:latin typeface="Calibri"/>
+                        </a:rPr>
+                        <a:t>Evidenced</a:t>
                       </a:r>
                     </a:p>
                   </a:txBody>
@@ -5264,7 +5264,7 @@
                           </a:solidFill>
                           <a:latin typeface="Calibri"/>
                         </a:rPr>
-                        <a:t>Numbered procedure from raw frame to label with equations - already implemented, needs writing up.</a:t>
+                        <a:t>Deck slides 17.1 and 17.2: a ten-step numbered derivation from webcam frame to predicted label. Steps 1–6 cover landmark extraction, concatenation, temporal resampling, wrist-origin translation, shoulder-width scaling and z-scoring with train-split-only statistics. Steps 7–9 give the LSTM gate and cell equations beside the 1D convolution and pooling equations, side by side. Step 10 is the shared head: dropout, GELU, softmax, argmax — plus the label-smoothed cross-entropy objective. Every equation is the one implemented in preprocess.py and models.py, not a textbook restatement.</a:t>
                       </a:r>
                     </a:p>
                   </a:txBody>
@@ -5376,7 +5376,7 @@
                           </a:solidFill>
                           <a:latin typeface="Calibri"/>
                         </a:rPr>
-                        <a:t>Deck slides 24-25; values are the ones actually used in the training run.</a:t>
+                        <a:t>Deck slides 24–25: the table and the tuning discussion. Values are the ones actually used: AdamW, cosine annealing, label smoothing 0.05, early stopping patience 20, lr 3e-3, batch 32, 60 epochs. Best epochs are recorded: 41/60 for BiLSTM, 45/60 for CNN.</a:t>
                       </a:r>
                     </a:p>
                   </a:txBody>
@@ -5422,7 +5422,7 @@
                           </a:solidFill>
                           <a:latin typeface="Calibri"/>
                         </a:rPr>
-                        <a:t>Results and discussion</a:t>
+                        <a:t>Results and discussion - Tables, graphs, inference achieved from the architecture.</a:t>
                       </a:r>
                     </a:p>
                   </a:txBody>
@@ -5488,7 +5488,7 @@
                           </a:solidFill>
                           <a:latin typeface="Calibri"/>
                         </a:rPr>
-                        <a:t>Deck slide 27: nine metrics, both models, measured on 642 held-out clips.</a:t>
+                        <a:t>Deck slide 27: nine metrics, both models, with a stated winner and observation per row. Numbers are measured on a 642-clip held-out test split, not estimated. The Research page in this app reads the same comparison.json off disk, so it cannot drift from the deck.</a:t>
                       </a:r>
                     </a:p>
                   </a:txBody>
@@ -5534,7 +5534,7 @@
                           </a:solidFill>
                           <a:latin typeface="Calibri"/>
                         </a:rPr>
-                        <a:t>Dataset chosen and its novelty - IEEE Dataport URL</a:t>
+                        <a:t>Dataset chosen, and the novelty in the dataset - IEEE Dataport URL required.</a:t>
                       </a:r>
                     </a:p>
                   </a:txBody>
@@ -5600,7 +5600,7 @@
                           </a:solidFill>
                           <a:latin typeface="Calibri"/>
                         </a:rPr>
-                        <a:t>Deck slides 13, 18-21: INCLUDE described; 261 classes, 4,276 usable clips.   MISSING: The IEEE Dataport URL, and a stated novelty for the dataset choice.</a:t>
+                        <a:t>Deck slides 13, 18–21: INCLUDE described, plus extraction results. Real counts: 261 classes, 4,276 usable clips after filtering classes with fewer than 5 recordings. Canonical sources verified: Zenodo record 4010759 (the 56.8 GB video release), the Hugging Face mirror ai4bharat/INCLUDE, and the ACM MM 2020 paper doi:10.1145/3394171.3413528. Dataset novelty: INCLUDE is the largest published lexical ISL corpus, recorded with experienced signers rather than crowd-sourced, which is why it supports 261 classes where most ISL work reports on 20–50.   MISSING: A decision on the IEEE Dataport requirement — see the note.</a:t>
                       </a:r>
                     </a:p>
                   </a:txBody>
@@ -5712,7 +5712,7 @@
                           </a:solidFill>
                           <a:latin typeface="Calibri"/>
                         </a:rPr>
-                        <a:t>Ten working screens, not mockups - the same build the demo runs on.</a:t>
+                        <a:t>Ten screens exist and run: gate, home, live, reverse, practice, transcripts, research, rubric, settings, about. These are the working application, not mockups — the same build the demo runs on.</a:t>
                       </a:r>
                     </a:p>
                   </a:txBody>
@@ -5758,7 +5758,7 @@
                           </a:solidFill>
                           <a:latin typeface="Calibri"/>
                         </a:rPr>
-                        <a:t>Standard paper chosen - title and justification</a:t>
+                        <a:t>Standard paper chosen for the application - Title and justification, from a journal.</a:t>
                       </a:r>
                     </a:p>
                   </a:txBody>
@@ -5824,7 +5824,7 @@
                           </a:solidFill>
                           <a:latin typeface="Calibri"/>
                         </a:rPr>
-                        <a:t>One paper nominated as the reference standard, with justification.</a:t>
+                        <a:t>One paper nominated as the reference standard, with a justification tying it to this system.</a:t>
                       </a:r>
                     </a:p>
                   </a:txBody>
@@ -6036,7 +6036,7 @@
         </p:nvGraphicFramePr>
         <p:xfrm>
           <a:off x="594360" y="1645920"/>
-          <a:ext cx="10424160" cy="3621024"/>
+          <a:ext cx="10424160" cy="4718304"/>
         </p:xfrm>
         <a:graphic>
           <a:graphicData uri="http://schemas.openxmlformats.org/drawingml/2006/table">
@@ -6379,6 +6379,142 @@
                           <a:latin typeface="Calibri"/>
                         </a:rPr>
                         <a:t>AdamW, cosine annealing, label smoothing 0.05, patience 20, lr 3e-3, batch 32, 60 epochs - as run.</a:t>
+                      </a:r>
+                    </a:p>
+                  </a:txBody>
+                  <a:tcPr marL="82296" marR="82296" marT="27432" marB="27432" anchor="ctr">
+                    <a:solidFill>
+                      <a:srgbClr val="F7F4F5"/>
+                    </a:solidFill>
+                  </a:tcPr>
+                </a:tc>
+              </a:tr>
+              <a:tr h="548640">
+                <a:tc>
+                  <a:txBody>
+                    <a:bodyPr wrap="square"/>
+                    <a:lstStyle/>
+                    <a:p>
+                      <a:r>
+                        <a:rPr sz="900" b="1" i="0">
+                          <a:solidFill>
+                            <a:srgbClr val="222222"/>
+                          </a:solidFill>
+                          <a:latin typeface="Calibri"/>
+                        </a:rPr>
+                        <a:t>6  Architecture (a-d)</a:t>
+                      </a:r>
+                    </a:p>
+                  </a:txBody>
+                  <a:tcPr marL="82296" marR="82296" marT="27432" marB="27432" anchor="ctr">
+                    <a:solidFill>
+                      <a:srgbClr val="FFFFFF"/>
+                    </a:solidFill>
+                  </a:tcPr>
+                </a:tc>
+                <a:tc>
+                  <a:txBody>
+                    <a:bodyPr wrap="square"/>
+                    <a:lstStyle/>
+                    <a:p>
+                      <a:r>
+                        <a:rPr sz="900" b="0" i="0">
+                          <a:solidFill>
+                            <a:srgbClr val="222222"/>
+                          </a:solidFill>
+                          <a:latin typeface="Calibri"/>
+                        </a:rPr>
+                        <a:t>Deck slides 22-23, 17.3, 17.4</a:t>
+                      </a:r>
+                    </a:p>
+                  </a:txBody>
+                  <a:tcPr marL="82296" marR="82296" marT="27432" marB="27432" anchor="ctr">
+                    <a:solidFill>
+                      <a:srgbClr val="FFFFFF"/>
+                    </a:solidFill>
+                  </a:tcPr>
+                </a:tc>
+                <a:tc>
+                  <a:txBody>
+                    <a:bodyPr wrap="square"/>
+                    <a:lstStyle/>
+                    <a:p>
+                      <a:r>
+                        <a:rPr sz="900" b="0" i="0">
+                          <a:solidFill>
+                            <a:srgbClr val="222222"/>
+                          </a:solidFill>
+                          <a:latin typeface="Calibri"/>
+                        </a:rPr>
+                        <a:t>Diagrams and rationale, plus big-O complexity and an explicitly narrow novelty claim.</a:t>
+                      </a:r>
+                    </a:p>
+                  </a:txBody>
+                  <a:tcPr marL="82296" marR="82296" marT="27432" marB="27432" anchor="ctr">
+                    <a:solidFill>
+                      <a:srgbClr val="FFFFFF"/>
+                    </a:solidFill>
+                  </a:tcPr>
+                </a:tc>
+              </a:tr>
+              <a:tr h="548640">
+                <a:tc>
+                  <a:txBody>
+                    <a:bodyPr wrap="square"/>
+                    <a:lstStyle/>
+                    <a:p>
+                      <a:r>
+                        <a:rPr sz="900" b="1" i="0">
+                          <a:solidFill>
+                            <a:srgbClr val="222222"/>
+                          </a:solidFill>
+                          <a:latin typeface="Calibri"/>
+                        </a:rPr>
+                        <a:t>7  Algorithm procedure</a:t>
+                      </a:r>
+                    </a:p>
+                  </a:txBody>
+                  <a:tcPr marL="82296" marR="82296" marT="27432" marB="27432" anchor="ctr">
+                    <a:solidFill>
+                      <a:srgbClr val="F7F4F5"/>
+                    </a:solidFill>
+                  </a:tcPr>
+                </a:tc>
+                <a:tc>
+                  <a:txBody>
+                    <a:bodyPr wrap="square"/>
+                    <a:lstStyle/>
+                    <a:p>
+                      <a:r>
+                        <a:rPr sz="900" b="0" i="0">
+                          <a:solidFill>
+                            <a:srgbClr val="222222"/>
+                          </a:solidFill>
+                          <a:latin typeface="Calibri"/>
+                        </a:rPr>
+                        <a:t>Deck slides 17.1-17.2</a:t>
+                      </a:r>
+                    </a:p>
+                  </a:txBody>
+                  <a:tcPr marL="82296" marR="82296" marT="27432" marB="27432" anchor="ctr">
+                    <a:solidFill>
+                      <a:srgbClr val="F7F4F5"/>
+                    </a:solidFill>
+                  </a:tcPr>
+                </a:tc>
+                <a:tc>
+                  <a:txBody>
+                    <a:bodyPr wrap="square"/>
+                    <a:lstStyle/>
+                    <a:p>
+                      <a:r>
+                        <a:rPr sz="900" b="0" i="0">
+                          <a:solidFill>
+                            <a:srgbClr val="222222"/>
+                          </a:solidFill>
+                          <a:latin typeface="Calibri"/>
+                        </a:rPr>
+                        <a:t>Ten numbered steps with the real equations, both models side by side against a shared spine.</a:t>
                       </a:r>
                     </a:p>
                   </a:txBody>
@@ -6715,7 +6851,7 @@
                 </a:solidFill>
                 <a:latin typeface="Cambria"/>
               </a:rPr>
-              <a:t>The Twelve Marks Not Yet Earned</a:t>
+              <a:t>The 13 Marks Not Yet Earned</a:t>
             </a:r>
           </a:p>
         </p:txBody>
@@ -6764,7 +6900,7 @@
         <p:spPr>
           <a:xfrm>
             <a:off x="594360" y="1627632"/>
-            <a:ext cx="3346704" cy="1874519"/>
+            <a:ext cx="3346704" cy="2011680"/>
           </a:xfrm>
           <a:prstGeom prst="rect">
             <a:avLst/>
@@ -6810,7 +6946,7 @@
         <p:spPr>
           <a:xfrm>
             <a:off x="594360" y="1627632"/>
-            <a:ext cx="73152" cy="1874519"/>
+            <a:ext cx="73152" cy="2011680"/>
           </a:xfrm>
           <a:prstGeom prst="rect">
             <a:avLst/>
@@ -6888,7 +7024,7 @@
         <p:spPr>
           <a:xfrm>
             <a:off x="868680" y="2048256"/>
-            <a:ext cx="2843784" cy="1344167"/>
+            <a:ext cx="2843784" cy="1481328"/>
           </a:xfrm>
           <a:prstGeom prst="rect">
             <a:avLst/>
@@ -6907,13 +7043,13 @@
               </a:lnSpc>
             </a:pPr>
             <a:r>
-              <a:rPr sz="1100" b="0" i="0">
+              <a:rPr sz="1000" b="0" i="0">
                 <a:solidFill>
                   <a:srgbClr val="5A5A5A"/>
                 </a:solidFill>
                 <a:latin typeface="Calibri"/>
               </a:rPr>
-              <a:t>Five papers on sign-language recognition or temporal architectures, each verified as appearing in a SCImago-listed journal for 2025 or 2026. Record citation, architecture, and reported metric values - the last of these is what row 5 needs.</a:t>
+              <a:t>Five papers, each confirmed present in the SCImago 2025/2026 listing — this confirmation has to be done by you, on scimagojr.com. For each: full citation, the architecture it uses, its reported metric values, and how it relates to the BiLSTM-vs-CNN comparison. A survey slide in the deck.</a:t>
             </a:r>
           </a:p>
         </p:txBody>
@@ -6926,8 +7062,8 @@
         </p:nvSpPr>
         <p:spPr>
           <a:xfrm>
-            <a:off x="4133087" y="1627632"/>
-            <a:ext cx="3346704" cy="1874519"/>
+            <a:off x="4133088" y="1627632"/>
+            <a:ext cx="3346704" cy="2011680"/>
           </a:xfrm>
           <a:prstGeom prst="rect">
             <a:avLst/>
@@ -6972,8 +7108,8 @@
         </p:nvSpPr>
         <p:spPr>
           <a:xfrm>
-            <a:off x="4133087" y="1627632"/>
-            <a:ext cx="73152" cy="1874519"/>
+            <a:off x="4133088" y="1627632"/>
+            <a:ext cx="73152" cy="2011680"/>
           </a:xfrm>
           <a:prstGeom prst="rect">
             <a:avLst/>
@@ -7016,7 +7152,7 @@
         </p:nvSpPr>
         <p:spPr>
           <a:xfrm>
-            <a:off x="4407407" y="1746504"/>
+            <a:off x="4407408" y="1746504"/>
             <a:ext cx="2843784" cy="274320"/>
           </a:xfrm>
           <a:prstGeom prst="rect">
@@ -7037,7 +7173,7 @@
                 </a:solidFill>
                 <a:latin typeface="Calibri"/>
               </a:rPr>
-              <a:t>Row 7 - Algorithm procedure (5)</a:t>
+              <a:t>Row 12 - Standard paper chosen for… (2)</a:t>
             </a:r>
           </a:p>
         </p:txBody>
@@ -7050,8 +7186,8 @@
         </p:nvSpPr>
         <p:spPr>
           <a:xfrm>
-            <a:off x="4407407" y="2048256"/>
-            <a:ext cx="2843784" cy="1344167"/>
+            <a:off x="4407408" y="2048256"/>
+            <a:ext cx="2843784" cy="1481328"/>
           </a:xfrm>
           <a:prstGeom prst="rect">
             <a:avLst/>
@@ -7070,27 +7206,61 @@
               </a:lnSpc>
             </a:pPr>
             <a:r>
-              <a:rPr sz="1100" b="0" i="0">
+              <a:rPr sz="1000" b="0" i="0">
                 <a:solidFill>
                   <a:srgbClr val="5A5A5A"/>
                 </a:solidFill>
                 <a:latin typeface="Calibri"/>
               </a:rPr>
-              <a:t>A numbered derivation: landmark extraction, wrist-origin translation, shoulder-width scaling, z-scoring with train-split statistics, the LSTM recurrence and 1-D convolution equations, mean-pooling, softmax, argmax. All of it is already implemented.</a:t>
+              <a:t>One paper nominated as the reference standard, with a justification tying it to this system.</a:t>
             </a:r>
           </a:p>
         </p:txBody>
       </p:sp>
       <p:sp>
         <p:nvSpPr>
-          <p:cNvPr id="15" name="Rectangle 14"/>
+          <p:cNvPr id="15" name="TextBox 14"/>
+          <p:cNvSpPr txBox="1"/>
+          <p:nvPr/>
+        </p:nvSpPr>
+        <p:spPr>
+          <a:xfrm>
+            <a:off x="594360" y="3913632"/>
+            <a:ext cx="10424160" cy="201168"/>
+          </a:xfrm>
+          <a:prstGeom prst="rect">
+            <a:avLst/>
+          </a:prstGeom>
+          <a:noFill/>
+        </p:spPr>
+        <p:txBody>
+          <a:bodyPr wrap="square" anchor="t" lIns="0" rIns="0" tIns="0" bIns="0">
+            <a:spAutoFit/>
+          </a:bodyPr>
+          <a:lstStyle/>
+          <a:p>
+            <a:r>
+              <a:rPr sz="900" b="1" i="0" spc="160">
+                <a:solidFill>
+                  <a:srgbClr val="086072"/>
+                </a:solidFill>
+                <a:latin typeface="Calibri"/>
+              </a:rPr>
+              <a:t>PARTIAL ROWS - WHAT CLOSES THEM</a:t>
+            </a:r>
+          </a:p>
+        </p:txBody>
+      </p:sp>
+      <p:sp>
+        <p:nvSpPr>
+          <p:cNvPr id="16" name="Rectangle 15"/>
           <p:cNvSpPr/>
           <p:nvPr/>
         </p:nvSpPr>
         <p:spPr>
           <a:xfrm>
-            <a:off x="7671816" y="1627632"/>
-            <a:ext cx="3346704" cy="1874519"/>
+            <a:off x="594360" y="4151376"/>
+            <a:ext cx="5148072" cy="731520"/>
           </a:xfrm>
           <a:prstGeom prst="rect">
             <a:avLst/>
@@ -7129,211 +7299,14 @@
       </p:sp>
       <p:sp>
         <p:nvSpPr>
-          <p:cNvPr id="16" name="Rectangle 15"/>
+          <p:cNvPr id="17" name="Rectangle 16"/>
           <p:cNvSpPr/>
           <p:nvPr/>
         </p:nvSpPr>
         <p:spPr>
           <a:xfrm>
-            <a:off x="7671816" y="1627632"/>
-            <a:ext cx="73152" cy="1874519"/>
-          </a:xfrm>
-          <a:prstGeom prst="rect">
-            <a:avLst/>
-          </a:prstGeom>
-          <a:solidFill>
-            <a:srgbClr val="77777D"/>
-          </a:solidFill>
-          <a:ln>
-            <a:noFill/>
-          </a:ln>
-          <a:effectLst/>
-        </p:spPr>
-        <p:style>
-          <a:lnRef idx="1">
-            <a:schemeClr val="accent1"/>
-          </a:lnRef>
-          <a:fillRef idx="3">
-            <a:schemeClr val="accent1"/>
-          </a:fillRef>
-          <a:effectRef idx="2">
-            <a:schemeClr val="accent1"/>
-          </a:effectRef>
-          <a:fontRef idx="minor">
-            <a:schemeClr val="lt1"/>
-          </a:fontRef>
-        </p:style>
-        <p:txBody>
-          <a:bodyPr rtlCol="0" anchor="ctr" wrap="square"/>
-          <a:lstStyle/>
-          <a:p>
-            <a:pPr algn="ctr"/>
-          </a:p>
-        </p:txBody>
-      </p:sp>
-      <p:sp>
-        <p:nvSpPr>
-          <p:cNvPr id="17" name="TextBox 16"/>
-          <p:cNvSpPr txBox="1"/>
-          <p:nvPr/>
-        </p:nvSpPr>
-        <p:spPr>
-          <a:xfrm>
-            <a:off x="7946136" y="1746504"/>
-            <a:ext cx="2843784" cy="274320"/>
-          </a:xfrm>
-          <a:prstGeom prst="rect">
-            <a:avLst/>
-          </a:prstGeom>
-          <a:noFill/>
-        </p:spPr>
-        <p:txBody>
-          <a:bodyPr wrap="square" anchor="t" lIns="0" rIns="0" tIns="0" bIns="0">
-            <a:spAutoFit/>
-          </a:bodyPr>
-          <a:lstStyle/>
-          <a:p>
-            <a:r>
-              <a:rPr sz="1300" b="1" i="0">
-                <a:solidFill>
-                  <a:srgbClr val="086072"/>
-                </a:solidFill>
-                <a:latin typeface="Calibri"/>
-              </a:rPr>
-              <a:t>Row 12 - Standard paper (2)</a:t>
-            </a:r>
-          </a:p>
-        </p:txBody>
-      </p:sp>
-      <p:sp>
-        <p:nvSpPr>
-          <p:cNvPr id="18" name="TextBox 17"/>
-          <p:cNvSpPr txBox="1"/>
-          <p:nvPr/>
-        </p:nvSpPr>
-        <p:spPr>
-          <a:xfrm>
-            <a:off x="7946136" y="2048256"/>
-            <a:ext cx="2843784" cy="1344167"/>
-          </a:xfrm>
-          <a:prstGeom prst="rect">
-            <a:avLst/>
-          </a:prstGeom>
-          <a:noFill/>
-        </p:spPr>
-        <p:txBody>
-          <a:bodyPr wrap="square" anchor="t" lIns="0" rIns="0" tIns="0" bIns="0">
-            <a:spAutoFit/>
-          </a:bodyPr>
-          <a:lstStyle/>
-          <a:p>
-            <a:pPr>
-              <a:lnSpc>
-                <a:spcPct val="112000"/>
-              </a:lnSpc>
-            </a:pPr>
-            <a:r>
-              <a:rPr sz="1100" b="0" i="0">
-                <a:solidFill>
-                  <a:srgbClr val="5A5A5A"/>
-                </a:solidFill>
-                <a:latin typeface="Calibri"/>
-              </a:rPr>
-              <a:t>One paper nominated as the reference standard for the application, with a justification tying it to this system. Falls out of row 2 - pick the closest of the five.</a:t>
-            </a:r>
-          </a:p>
-        </p:txBody>
-      </p:sp>
-      <p:sp>
-        <p:nvSpPr>
-          <p:cNvPr id="19" name="TextBox 18"/>
-          <p:cNvSpPr txBox="1"/>
-          <p:nvPr/>
-        </p:nvSpPr>
-        <p:spPr>
-          <a:xfrm>
-            <a:off x="594360" y="3749039"/>
-            <a:ext cx="10424160" cy="201168"/>
-          </a:xfrm>
-          <a:prstGeom prst="rect">
-            <a:avLst/>
-          </a:prstGeom>
-          <a:noFill/>
-        </p:spPr>
-        <p:txBody>
-          <a:bodyPr wrap="square" anchor="t" lIns="0" rIns="0" tIns="0" bIns="0">
-            <a:spAutoFit/>
-          </a:bodyPr>
-          <a:lstStyle/>
-          <a:p>
-            <a:r>
-              <a:rPr sz="900" b="1" i="0" spc="160">
-                <a:solidFill>
-                  <a:srgbClr val="086072"/>
-                </a:solidFill>
-                <a:latin typeface="Calibri"/>
-              </a:rPr>
-              <a:t>PARTIAL ROWS - WHAT CLOSES THEM</a:t>
-            </a:r>
-          </a:p>
-        </p:txBody>
-      </p:sp>
-      <p:sp>
-        <p:nvSpPr>
-          <p:cNvPr id="20" name="Rectangle 19"/>
-          <p:cNvSpPr/>
-          <p:nvPr/>
-        </p:nvSpPr>
-        <p:spPr>
-          <a:xfrm>
-            <a:off x="594360" y="3986783"/>
-            <a:ext cx="3389376" cy="731520"/>
-          </a:xfrm>
-          <a:prstGeom prst="rect">
-            <a:avLst/>
-          </a:prstGeom>
-          <a:solidFill>
-            <a:srgbClr val="FFFFFF"/>
-          </a:solidFill>
-          <a:ln w="12700">
-            <a:solidFill>
-              <a:srgbClr val="E4D9DD"/>
-            </a:solidFill>
-          </a:ln>
-          <a:effectLst/>
-        </p:spPr>
-        <p:style>
-          <a:lnRef idx="1">
-            <a:schemeClr val="accent1"/>
-          </a:lnRef>
-          <a:fillRef idx="3">
-            <a:schemeClr val="accent1"/>
-          </a:fillRef>
-          <a:effectRef idx="2">
-            <a:schemeClr val="accent1"/>
-          </a:effectRef>
-          <a:fontRef idx="minor">
-            <a:schemeClr val="lt1"/>
-          </a:fontRef>
-        </p:style>
-        <p:txBody>
-          <a:bodyPr rtlCol="0" anchor="ctr" wrap="square"/>
-          <a:lstStyle/>
-          <a:p>
-            <a:pPr algn="ctr"/>
-          </a:p>
-        </p:txBody>
-      </p:sp>
-      <p:sp>
-        <p:nvSpPr>
-          <p:cNvPr id="21" name="Rectangle 20"/>
-          <p:cNvSpPr/>
-          <p:nvPr/>
-        </p:nvSpPr>
-        <p:spPr>
-          <a:xfrm>
-            <a:off x="594360" y="3986783"/>
-            <a:ext cx="3389376" cy="45720"/>
+            <a:off x="594360" y="4151376"/>
+            <a:ext cx="5148072" cy="45720"/>
           </a:xfrm>
           <a:prstGeom prst="rect">
             <a:avLst/>
@@ -7370,14 +7343,14 @@
       </p:sp>
       <p:sp>
         <p:nvSpPr>
-          <p:cNvPr id="22" name="TextBox 21"/>
+          <p:cNvPr id="18" name="TextBox 17"/>
           <p:cNvSpPr txBox="1"/>
           <p:nvPr/>
         </p:nvSpPr>
         <p:spPr>
           <a:xfrm>
-            <a:off x="713232" y="4114800"/>
-            <a:ext cx="3151632" cy="201168"/>
+            <a:off x="713232" y="4279392"/>
+            <a:ext cx="4910328" cy="201168"/>
           </a:xfrm>
           <a:prstGeom prst="rect">
             <a:avLst/>
@@ -7404,14 +7377,14 @@
       </p:sp>
       <p:sp>
         <p:nvSpPr>
-          <p:cNvPr id="23" name="TextBox 22"/>
+          <p:cNvPr id="19" name="TextBox 18"/>
           <p:cNvSpPr txBox="1"/>
           <p:nvPr/>
         </p:nvSpPr>
         <p:spPr>
           <a:xfrm>
-            <a:off x="713232" y="4325112"/>
-            <a:ext cx="3151632" cy="365760"/>
+            <a:off x="713232" y="4489704"/>
+            <a:ext cx="4910328" cy="365760"/>
           </a:xfrm>
           <a:prstGeom prst="rect">
             <a:avLst/>
@@ -7436,21 +7409,21 @@
                 </a:solidFill>
                 <a:latin typeface="Calibri"/>
               </a:rPr>
-              <a:t>Add a 'best reported value' column to the metrics table, sourced from the survey.</a:t>
+              <a:t>A fourth column: best values reported for each metric in the surveyed papers — which needs row 2 done first.</a:t>
             </a:r>
           </a:p>
         </p:txBody>
       </p:sp>
       <p:sp>
         <p:nvSpPr>
-          <p:cNvPr id="24" name="Rectangle 23"/>
+          <p:cNvPr id="20" name="Rectangle 19"/>
           <p:cNvSpPr/>
           <p:nvPr/>
         </p:nvSpPr>
         <p:spPr>
           <a:xfrm>
-            <a:off x="4111752" y="3986783"/>
-            <a:ext cx="3389376" cy="731520"/>
+            <a:off x="5870448" y="4151376"/>
+            <a:ext cx="5148072" cy="731520"/>
           </a:xfrm>
           <a:prstGeom prst="rect">
             <a:avLst/>
@@ -7489,14 +7462,14 @@
       </p:sp>
       <p:sp>
         <p:nvSpPr>
-          <p:cNvPr id="25" name="Rectangle 24"/>
+          <p:cNvPr id="21" name="Rectangle 20"/>
           <p:cNvSpPr/>
           <p:nvPr/>
         </p:nvSpPr>
         <p:spPr>
           <a:xfrm>
-            <a:off x="4111752" y="3986783"/>
-            <a:ext cx="3389376" cy="45720"/>
+            <a:off x="5870448" y="4151376"/>
+            <a:ext cx="5148072" cy="45720"/>
           </a:xfrm>
           <a:prstGeom prst="rect">
             <a:avLst/>
@@ -7533,14 +7506,14 @@
       </p:sp>
       <p:sp>
         <p:nvSpPr>
-          <p:cNvPr id="26" name="TextBox 25"/>
+          <p:cNvPr id="22" name="TextBox 21"/>
           <p:cNvSpPr txBox="1"/>
           <p:nvPr/>
         </p:nvSpPr>
         <p:spPr>
           <a:xfrm>
-            <a:off x="4230624" y="4114800"/>
-            <a:ext cx="3151632" cy="201168"/>
+            <a:off x="5989320" y="4279392"/>
+            <a:ext cx="4910328" cy="201168"/>
           </a:xfrm>
           <a:prstGeom prst="rect">
             <a:avLst/>
@@ -7560,21 +7533,21 @@
                 </a:solidFill>
                 <a:latin typeface="Calibri"/>
               </a:rPr>
-              <a:t>Row 6 (5)</a:t>
+              <a:t>Row 10 (3)</a:t>
             </a:r>
           </a:p>
         </p:txBody>
       </p:sp>
       <p:sp>
         <p:nvSpPr>
-          <p:cNvPr id="27" name="TextBox 26"/>
+          <p:cNvPr id="23" name="TextBox 22"/>
           <p:cNvSpPr txBox="1"/>
           <p:nvPr/>
         </p:nvSpPr>
         <p:spPr>
           <a:xfrm>
-            <a:off x="4230624" y="4325112"/>
-            <a:ext cx="3151632" cy="365760"/>
+            <a:off x="5989320" y="4489704"/>
+            <a:ext cx="4910328" cy="365760"/>
           </a:xfrm>
           <a:prstGeom prst="rect">
             <a:avLst/>
@@ -7599,184 +7572,21 @@
                 </a:solidFill>
                 <a:latin typeface="Calibri"/>
               </a:rPr>
-              <a:t>Add the novelty statement and big-O time/space for both models.</a:t>
+              <a:t>A decision on the IEEE Dataport requirement — see the note.</a:t>
             </a:r>
           </a:p>
         </p:txBody>
       </p:sp>
       <p:sp>
         <p:nvSpPr>
-          <p:cNvPr id="28" name="Rectangle 27"/>
+          <p:cNvPr id="24" name="Rectangle 23"/>
           <p:cNvSpPr/>
           <p:nvPr/>
         </p:nvSpPr>
         <p:spPr>
           <a:xfrm>
-            <a:off x="7629144" y="3986783"/>
-            <a:ext cx="3389376" cy="731520"/>
-          </a:xfrm>
-          <a:prstGeom prst="rect">
-            <a:avLst/>
-          </a:prstGeom>
-          <a:solidFill>
-            <a:srgbClr val="FFFFFF"/>
-          </a:solidFill>
-          <a:ln w="12700">
-            <a:solidFill>
-              <a:srgbClr val="E4D9DD"/>
-            </a:solidFill>
-          </a:ln>
-          <a:effectLst/>
-        </p:spPr>
-        <p:style>
-          <a:lnRef idx="1">
-            <a:schemeClr val="accent1"/>
-          </a:lnRef>
-          <a:fillRef idx="3">
-            <a:schemeClr val="accent1"/>
-          </a:fillRef>
-          <a:effectRef idx="2">
-            <a:schemeClr val="accent1"/>
-          </a:effectRef>
-          <a:fontRef idx="minor">
-            <a:schemeClr val="lt1"/>
-          </a:fontRef>
-        </p:style>
-        <p:txBody>
-          <a:bodyPr rtlCol="0" anchor="ctr" wrap="square"/>
-          <a:lstStyle/>
-          <a:p>
-            <a:pPr algn="ctr"/>
-          </a:p>
-        </p:txBody>
-      </p:sp>
-      <p:sp>
-        <p:nvSpPr>
-          <p:cNvPr id="29" name="Rectangle 28"/>
-          <p:cNvSpPr/>
-          <p:nvPr/>
-        </p:nvSpPr>
-        <p:spPr>
-          <a:xfrm>
-            <a:off x="7629144" y="3986783"/>
-            <a:ext cx="3389376" cy="45720"/>
-          </a:xfrm>
-          <a:prstGeom prst="rect">
-            <a:avLst/>
-          </a:prstGeom>
-          <a:solidFill>
-            <a:srgbClr val="086072"/>
-          </a:solidFill>
-          <a:ln>
-            <a:noFill/>
-          </a:ln>
-          <a:effectLst/>
-        </p:spPr>
-        <p:style>
-          <a:lnRef idx="1">
-            <a:schemeClr val="accent1"/>
-          </a:lnRef>
-          <a:fillRef idx="3">
-            <a:schemeClr val="accent1"/>
-          </a:fillRef>
-          <a:effectRef idx="2">
-            <a:schemeClr val="accent1"/>
-          </a:effectRef>
-          <a:fontRef idx="minor">
-            <a:schemeClr val="lt1"/>
-          </a:fontRef>
-        </p:style>
-        <p:txBody>
-          <a:bodyPr rtlCol="0" anchor="ctr" wrap="square"/>
-          <a:lstStyle/>
-          <a:p>
-            <a:pPr algn="ctr"/>
-          </a:p>
-        </p:txBody>
-      </p:sp>
-      <p:sp>
-        <p:nvSpPr>
-          <p:cNvPr id="30" name="TextBox 29"/>
-          <p:cNvSpPr txBox="1"/>
-          <p:nvPr/>
-        </p:nvSpPr>
-        <p:spPr>
-          <a:xfrm>
-            <a:off x="7748016" y="4114800"/>
-            <a:ext cx="3151632" cy="201168"/>
-          </a:xfrm>
-          <a:prstGeom prst="rect">
-            <a:avLst/>
-          </a:prstGeom>
-          <a:noFill/>
-        </p:spPr>
-        <p:txBody>
-          <a:bodyPr wrap="square" anchor="t" lIns="0" rIns="0" tIns="0" bIns="0">
-            <a:spAutoFit/>
-          </a:bodyPr>
-          <a:lstStyle/>
-          <a:p>
-            <a:r>
-              <a:rPr sz="1050" b="1" i="0">
-                <a:solidFill>
-                  <a:srgbClr val="086072"/>
-                </a:solidFill>
-                <a:latin typeface="Calibri"/>
-              </a:rPr>
-              <a:t>Row 10 (3)</a:t>
-            </a:r>
-          </a:p>
-        </p:txBody>
-      </p:sp>
-      <p:sp>
-        <p:nvSpPr>
-          <p:cNvPr id="31" name="TextBox 30"/>
-          <p:cNvSpPr txBox="1"/>
-          <p:nvPr/>
-        </p:nvSpPr>
-        <p:spPr>
-          <a:xfrm>
-            <a:off x="7748016" y="4325112"/>
-            <a:ext cx="3151632" cy="365760"/>
-          </a:xfrm>
-          <a:prstGeom prst="rect">
-            <a:avLst/>
-          </a:prstGeom>
-          <a:noFill/>
-        </p:spPr>
-        <p:txBody>
-          <a:bodyPr wrap="square" anchor="t" lIns="0" rIns="0" tIns="0" bIns="0">
-            <a:spAutoFit/>
-          </a:bodyPr>
-          <a:lstStyle/>
-          <a:p>
-            <a:pPr>
-              <a:lnSpc>
-                <a:spcPct val="105000"/>
-              </a:lnSpc>
-            </a:pPr>
-            <a:r>
-              <a:rPr sz="850" b="0" i="0">
-                <a:solidFill>
-                  <a:srgbClr val="5A5A5A"/>
-                </a:solidFill>
-                <a:latin typeface="Calibri"/>
-              </a:rPr>
-              <a:t>Supply the IEEE Dataport URL; confirm whether the Zenodo DOI is acceptable.</a:t>
-            </a:r>
-          </a:p>
-        </p:txBody>
-      </p:sp>
-      <p:sp>
-        <p:nvSpPr>
-          <p:cNvPr id="32" name="Rectangle 31"/>
-          <p:cNvSpPr/>
-          <p:nvPr/>
-        </p:nvSpPr>
-        <p:spPr>
-          <a:xfrm>
-            <a:off x="594360" y="4846320"/>
-            <a:ext cx="10424160" cy="713232"/>
+            <a:off x="594360" y="5010912"/>
+            <a:ext cx="10424160" cy="786384"/>
           </a:xfrm>
           <a:prstGeom prst="rect">
             <a:avLst/>
@@ -7815,14 +7625,14 @@
       </p:sp>
       <p:sp>
         <p:nvSpPr>
-          <p:cNvPr id="33" name="Rectangle 32"/>
+          <p:cNvPr id="25" name="Rectangle 24"/>
           <p:cNvSpPr/>
           <p:nvPr/>
         </p:nvSpPr>
         <p:spPr>
           <a:xfrm>
-            <a:off x="594360" y="4846320"/>
-            <a:ext cx="73152" cy="713232"/>
+            <a:off x="594360" y="5010912"/>
+            <a:ext cx="73152" cy="786384"/>
           </a:xfrm>
           <a:prstGeom prst="rect">
             <a:avLst/>
@@ -7859,14 +7669,14 @@
       </p:sp>
       <p:sp>
         <p:nvSpPr>
-          <p:cNvPr id="34" name="TextBox 33"/>
+          <p:cNvPr id="26" name="TextBox 25"/>
           <p:cNvSpPr txBox="1"/>
           <p:nvPr/>
         </p:nvSpPr>
         <p:spPr>
           <a:xfrm>
-            <a:off x="868680" y="4956048"/>
-            <a:ext cx="9921240" cy="493776"/>
+            <a:off x="868680" y="5120640"/>
+            <a:ext cx="9921240" cy="566928"/>
           </a:xfrm>
           <a:prstGeom prst="rect">
             <a:avLst/>
@@ -7891,7 +7701,7 @@
                 </a:solidFill>
                 <a:latin typeface="Calibri"/>
               </a:rPr>
-              <a:t>Worth checking: </a:t>
+              <a:t>The honest position: </a:t>
             </a:r>
             <a:r>
               <a:rPr sz="1100" b="0" i="0">
@@ -7900,7 +7710,7 @@
                 </a:solidFill>
                 <a:latin typeface="Calibri"/>
               </a:rPr>
-              <a:t>INCLUDE is distributed via Zenodo. If it is not on IEEE Dataport, ask whether the Zenodo DOI satisfies row 10 rather than citing a URL that does not resolve - a broken link in a review is worse than an honest substitution.</a:t>
+              <a:t>what remains is the literature survey and everything that depends on it. Those marks need papers actually read and verified against the SCImago listing - they cannot be manufactured. docs/literature-survey-worksheet.md holds a URL-verified candidate shortlist and the verification procedure.</a:t>
             </a:r>
           </a:p>
         </p:txBody>
